--- a/material/Python/09_2_반복문_while.pptx
+++ b/material/Python/09_2_반복문_while.pptx
@@ -1,6 +1,6 @@
 
 <file path=ppt/presentation.xml><?xml version="1.0" encoding="utf-8"?>
-<p:presentation xmlns:a="http://schemas.openxmlformats.org/drawingml/2006/main" xmlns:r="http://schemas.openxmlformats.org/officeDocument/2006/relationships" xmlns:p="http://schemas.openxmlformats.org/presentationml/2006/main" saveSubsetFonts="1">
+<p:presentation xmlns:a="http://schemas.openxmlformats.org/drawingml/2006/main" xmlns:r="http://schemas.openxmlformats.org/officeDocument/2006/relationships" xmlns:p="http://schemas.openxmlformats.org/presentationml/2006/main" embedTrueTypeFonts="1" saveSubsetFonts="1">
   <p:sldMasterIdLst>
     <p:sldMasterId id="2147483660" r:id="rId1"/>
   </p:sldMasterIdLst>
@@ -37,6 +37,33 @@
   </p:sldIdLst>
   <p:sldSz cx="12192000" cy="6858000"/>
   <p:notesSz cx="6858000" cy="9144000"/>
+  <p:embeddedFontLst>
+    <p:embeddedFont>
+      <p:font typeface="G마켓 산스 TTF Bold" panose="02000000000000000000" pitchFamily="2" charset="-127"/>
+      <p:bold r:id="rId29"/>
+    </p:embeddedFont>
+    <p:embeddedFont>
+      <p:font typeface="Pretendard Black" panose="02000A03000000020004" pitchFamily="2" charset="-127"/>
+      <p:bold r:id="rId30"/>
+    </p:embeddedFont>
+    <p:embeddedFont>
+      <p:font typeface="Pretendard Light" panose="02000403000000020004" pitchFamily="2" charset="-127"/>
+      <p:regular r:id="rId31"/>
+    </p:embeddedFont>
+    <p:embeddedFont>
+      <p:font typeface="Pretendard Medium" panose="02000603000000020004" pitchFamily="2" charset="-127"/>
+      <p:regular r:id="rId32"/>
+    </p:embeddedFont>
+    <p:embeddedFont>
+      <p:font typeface="Malgun Gothic Semilight" panose="020B0502040204020203" pitchFamily="50" charset="-127"/>
+      <p:regular r:id="rId33"/>
+    </p:embeddedFont>
+    <p:embeddedFont>
+      <p:font typeface="메이플스토리" panose="02000300000000000000" pitchFamily="2" charset="-127"/>
+      <p:regular r:id="rId34"/>
+      <p:bold r:id="rId35"/>
+    </p:embeddedFont>
+  </p:embeddedFontLst>
   <p:defaultTextStyle>
     <a:defPPr>
       <a:defRPr lang="ko-KR"/>
@@ -243,7 +270,7 @@
             <a:fld id="{A13A867C-D490-40C2-AB8D-A60FA70A9BF5}" type="datetimeFigureOut">
               <a:rPr lang="ko-KR" altLang="en-US" smtClean="0"/>
               <a:pPr/>
-              <a:t>2025-07-17</a:t>
+              <a:t>2025-08-21</a:t>
             </a:fld>
             <a:endParaRPr lang="ko-KR" altLang="en-US" dirty="0"/>
           </a:p>
@@ -2939,7 +2966,7 @@
           <a:p>
             <a:fld id="{442BEE3F-2E9A-4FD8-8B8A-8619F3E161C0}" type="datetime1">
               <a:rPr lang="ko-KR" altLang="en-US" smtClean="0"/>
-              <a:t>2025-07-17</a:t>
+              <a:t>2025-08-21</a:t>
             </a:fld>
             <a:endParaRPr lang="ko-KR" altLang="en-US"/>
           </a:p>
@@ -3226,7 +3253,7 @@
           <a:p>
             <a:fld id="{0F78D9C4-20C1-4B15-A116-16DC77AD9A1E}" type="datetime1">
               <a:rPr lang="ko-KR" altLang="en-US" smtClean="0"/>
-              <a:t>2025-07-17</a:t>
+              <a:t>2025-08-21</a:t>
             </a:fld>
             <a:endParaRPr lang="ko-KR" altLang="en-US"/>
           </a:p>
@@ -3401,7 +3428,7 @@
           <a:p>
             <a:fld id="{7F5E23C3-0E3D-4E4E-8486-D7FB4C073DC1}" type="datetime1">
               <a:rPr lang="ko-KR" altLang="en-US" smtClean="0"/>
-              <a:t>2025-07-17</a:t>
+              <a:t>2025-08-21</a:t>
             </a:fld>
             <a:endParaRPr lang="ko-KR" altLang="en-US"/>
           </a:p>
@@ -3730,7 +3757,7 @@
           <a:p>
             <a:fld id="{7F5E23C3-0E3D-4E4E-8486-D7FB4C073DC1}" type="datetime1">
               <a:rPr lang="ko-KR" altLang="en-US" smtClean="0"/>
-              <a:t>2025-07-17</a:t>
+              <a:t>2025-08-21</a:t>
             </a:fld>
             <a:endParaRPr lang="ko-KR" altLang="en-US"/>
           </a:p>
@@ -4535,7 +4562,7 @@
           <a:p>
             <a:fld id="{0F78D9C4-20C1-4B15-A116-16DC77AD9A1E}" type="datetime1">
               <a:rPr lang="ko-KR" altLang="en-US" smtClean="0"/>
-              <a:t>2025-07-17</a:t>
+              <a:t>2025-08-21</a:t>
             </a:fld>
             <a:endParaRPr lang="ko-KR" altLang="en-US" dirty="0"/>
           </a:p>
@@ -4947,7 +4974,7 @@
           <a:p>
             <a:fld id="{0F78D9C4-20C1-4B15-A116-16DC77AD9A1E}" type="datetime1">
               <a:rPr lang="ko-KR" altLang="en-US" smtClean="0"/>
-              <a:t>2025-07-17</a:t>
+              <a:t>2025-08-21</a:t>
             </a:fld>
             <a:endParaRPr lang="ko-KR" altLang="en-US" dirty="0"/>
           </a:p>
@@ -5500,7 +5527,7 @@
           <a:p>
             <a:fld id="{76022175-F16A-4A96-8E45-178BE9345AE9}" type="datetime6">
               <a:rPr lang="ko-KR" altLang="en-US" smtClean="0"/>
-              <a:t>2025년 7월</a:t>
+              <a:t>2025년 8월</a:t>
             </a:fld>
             <a:endParaRPr lang="ko-KR" altLang="en-US"/>
           </a:p>
@@ -6026,7 +6053,7 @@
           <a:p>
             <a:fld id="{76022175-F16A-4A96-8E45-178BE9345AE9}" type="datetime6">
               <a:rPr lang="ko-KR" altLang="en-US" smtClean="0"/>
-              <a:t>2025년 7월</a:t>
+              <a:t>2025년 8월</a:t>
             </a:fld>
             <a:endParaRPr lang="ko-KR" altLang="en-US"/>
           </a:p>
@@ -6342,7 +6369,7 @@
           <a:p>
             <a:fld id="{0F78D9C4-20C1-4B15-A116-16DC77AD9A1E}" type="datetime1">
               <a:rPr lang="ko-KR" altLang="en-US" smtClean="0"/>
-              <a:t>2025-07-17</a:t>
+              <a:t>2025-08-21</a:t>
             </a:fld>
             <a:endParaRPr lang="ko-KR" altLang="en-US" dirty="0"/>
           </a:p>
@@ -6841,7 +6868,7 @@
           <a:p>
             <a:fld id="{0F78D9C4-20C1-4B15-A116-16DC77AD9A1E}" type="datetime1">
               <a:rPr lang="ko-KR" altLang="en-US" smtClean="0"/>
-              <a:t>2025-07-17</a:t>
+              <a:t>2025-08-21</a:t>
             </a:fld>
             <a:endParaRPr lang="ko-KR" altLang="en-US" dirty="0"/>
           </a:p>
@@ -7179,7 +7206,7 @@
           <a:p>
             <a:fld id="{0F78D9C4-20C1-4B15-A116-16DC77AD9A1E}" type="datetime1">
               <a:rPr lang="ko-KR" altLang="en-US" smtClean="0"/>
-              <a:t>2025-07-17</a:t>
+              <a:t>2025-08-21</a:t>
             </a:fld>
             <a:endParaRPr lang="ko-KR" altLang="en-US" dirty="0"/>
           </a:p>
@@ -7440,7 +7467,7 @@
           <a:p>
             <a:fld id="{0F78D9C4-20C1-4B15-A116-16DC77AD9A1E}" type="datetime1">
               <a:rPr lang="ko-KR" altLang="en-US" smtClean="0"/>
-              <a:t>2025-07-17</a:t>
+              <a:t>2025-08-21</a:t>
             </a:fld>
             <a:endParaRPr lang="ko-KR" altLang="en-US" dirty="0"/>
           </a:p>
@@ -7777,7 +7804,7 @@
           <a:p>
             <a:fld id="{0F78D9C4-20C1-4B15-A116-16DC77AD9A1E}" type="datetime1">
               <a:rPr lang="ko-KR" altLang="en-US" smtClean="0"/>
-              <a:t>2025-07-17</a:t>
+              <a:t>2025-08-21</a:t>
             </a:fld>
             <a:endParaRPr lang="ko-KR" altLang="en-US" dirty="0"/>
           </a:p>
@@ -8621,7 +8648,7 @@
           <a:p>
             <a:fld id="{76022175-F16A-4A96-8E45-178BE9345AE9}" type="datetime6">
               <a:rPr lang="ko-KR" altLang="en-US" smtClean="0"/>
-              <a:t>2025년 7월</a:t>
+              <a:t>2025년 8월</a:t>
             </a:fld>
             <a:endParaRPr lang="ko-KR" altLang="en-US"/>
           </a:p>
@@ -9144,7 +9171,7 @@
           <a:p>
             <a:fld id="{76022175-F16A-4A96-8E45-178BE9345AE9}" type="datetime6">
               <a:rPr lang="ko-KR" altLang="en-US" smtClean="0"/>
-              <a:t>2025년 7월</a:t>
+              <a:t>2025년 8월</a:t>
             </a:fld>
             <a:endParaRPr lang="ko-KR" altLang="en-US"/>
           </a:p>
@@ -9532,7 +9559,7 @@
           <a:p>
             <a:fld id="{0F78D9C4-20C1-4B15-A116-16DC77AD9A1E}" type="datetime1">
               <a:rPr lang="ko-KR" altLang="en-US" smtClean="0"/>
-              <a:t>2025-07-17</a:t>
+              <a:t>2025-08-21</a:t>
             </a:fld>
             <a:endParaRPr lang="ko-KR" altLang="en-US" dirty="0"/>
           </a:p>
@@ -9958,7 +9985,7 @@
           <a:p>
             <a:fld id="{0F78D9C4-20C1-4B15-A116-16DC77AD9A1E}" type="datetime1">
               <a:rPr lang="ko-KR" altLang="en-US" smtClean="0"/>
-              <a:t>2025-07-17</a:t>
+              <a:t>2025-08-21</a:t>
             </a:fld>
             <a:endParaRPr lang="ko-KR" altLang="en-US" dirty="0"/>
           </a:p>
@@ -10586,7 +10613,7 @@
           <a:p>
             <a:fld id="{76022175-F16A-4A96-8E45-178BE9345AE9}" type="datetime6">
               <a:rPr lang="ko-KR" altLang="en-US" smtClean="0"/>
-              <a:t>2025년 7월</a:t>
+              <a:t>2025년 8월</a:t>
             </a:fld>
             <a:endParaRPr lang="ko-KR" altLang="en-US"/>
           </a:p>
@@ -10993,7 +11020,7 @@
           <a:p>
             <a:fld id="{0F78D9C4-20C1-4B15-A116-16DC77AD9A1E}" type="datetime1">
               <a:rPr lang="ko-KR" altLang="en-US" smtClean="0"/>
-              <a:t>2025-07-17</a:t>
+              <a:t>2025-08-21</a:t>
             </a:fld>
             <a:endParaRPr lang="ko-KR" altLang="en-US" dirty="0"/>
           </a:p>
@@ -11550,7 +11577,7 @@
           <a:p>
             <a:fld id="{0F78D9C4-20C1-4B15-A116-16DC77AD9A1E}" type="datetime1">
               <a:rPr lang="ko-KR" altLang="en-US" smtClean="0"/>
-              <a:t>2025-07-17</a:t>
+              <a:t>2025-08-21</a:t>
             </a:fld>
             <a:endParaRPr lang="ko-KR" altLang="en-US" dirty="0"/>
           </a:p>
@@ -12010,7 +12037,7 @@
           <a:p>
             <a:fld id="{0F78D9C4-20C1-4B15-A116-16DC77AD9A1E}" type="datetime1">
               <a:rPr lang="ko-KR" altLang="en-US" smtClean="0"/>
-              <a:t>2025-07-17</a:t>
+              <a:t>2025-08-21</a:t>
             </a:fld>
             <a:endParaRPr lang="ko-KR" altLang="en-US" dirty="0"/>
           </a:p>
@@ -13473,7 +13500,7 @@
           <a:p>
             <a:fld id="{0F78D9C4-20C1-4B15-A116-16DC77AD9A1E}" type="datetime1">
               <a:rPr lang="ko-KR" altLang="en-US" smtClean="0"/>
-              <a:t>2025-07-17</a:t>
+              <a:t>2025-08-21</a:t>
             </a:fld>
             <a:endParaRPr lang="ko-KR" altLang="en-US" dirty="0"/>
           </a:p>
@@ -14038,7 +14065,7 @@
           <a:p>
             <a:fld id="{0F78D9C4-20C1-4B15-A116-16DC77AD9A1E}" type="datetime1">
               <a:rPr lang="ko-KR" altLang="en-US" smtClean="0"/>
-              <a:t>2025-07-17</a:t>
+              <a:t>2025-08-21</a:t>
             </a:fld>
             <a:endParaRPr lang="ko-KR" altLang="en-US"/>
           </a:p>
